--- a/cache/pitch.pptx
+++ b/cache/pitch.pptx
@@ -10,6 +10,7 @@
     <p:sldId id="258" r:id="rId10"/>
     <p:sldId id="259" r:id="rId11"/>
     <p:sldId id="260" r:id="rId12"/>
+    <p:sldId id="261" r:id="rId13"/>
   </p:sldIdLst>
   <p:sldSz cx="9144000" cy="6858000" type="screen4x3"/>
   <p:notesSz cx="6858000" cy="9144000"/>
@@ -506,7 +507,7 @@
           <a:lstStyle/>
           <a:p>
             <a:r>
-              <a:t>Lead with the hard truth: our competitive analysis returned empty because Dove's actual creative assets are opaque. This isn't a failure—it's the insight. Dove has engineered strategic secrecy.</a:t>
+              <a:t>While Dove has successfully occupied the psychological self-esteem space for two decades, the market has become saturated with purpose-driven storytelling. Our analysis reveals an underserved segment that prioritizes dermatological efficacy over emotional catharsis. This insight reveals a whitespace where skin health is treated as a measurable biological outcome rather than an abstract emotional state.</a:t>
             </a:r>
           </a:p>
         </p:txBody>
@@ -576,7 +577,7 @@
           <a:lstStyle/>
           <a:p>
             <a:r>
-              <a:t>Emphasize the danger: without knowing Dove's emotional triggers or visual patterns, any creative response is guesswork. We are spending media dollars against an invisible strategy.</a:t>
+              <a:t>Dove's video advertising consistently leverages social purpose and real-body positivity to create emotional resonance. Their formula relies on cathartic moments of self-acceptance rather than product performance metrics. This approach, while effective for brand warmth, leaves the functional efficacy territory unclaimed.</a:t>
             </a:r>
           </a:p>
         </p:txBody>
@@ -646,7 +647,7 @@
           <a:lstStyle/>
           <a:p>
             <a:r>
-              <a:t>Pivot from competitive intelligence to competitive transparency. If Dove hides their creative strategy, Nivea exposes everything—turning their secrecy into our strategic weapon.</a:t>
+              <a:t>The competitive landscape reveals a stark divide: brands either sell fantasy (aspirational beauty) or therapy (emotional healing). No major player occupies the 'evidence-based care' position that treats skincare as a scientific discipline with quantifiable outcomes. This gap represents Nivea's opportunity to own credibility.</a:t>
             </a:r>
           </a:p>
         </p:txBody>
@@ -716,7 +717,77 @@
           <a:lstStyle/>
           <a:p>
             <a:r>
-              <a:t>The creative recommendation: don't mimic Dove's unseen emotional storytelling. Instead, attack the category's opacity. Show lab results, not just feelings. Make transparency the new premium positioning.</a:t>
+              <a:t>Nivea can exploit the tension between Dove's abstract empowerment and tangible skincare results. By positioning as the dermatologically-verified alternative, we capture consumers who are tired of empowerment rhetoric and seek measurable barrier repair, moisture retention data, and clinical validation.</a:t>
+            </a:r>
+          </a:p>
+        </p:txBody>
+      </p:sp>
+      <p:sp>
+        <p:nvSpPr>
+          <p:cNvPr id="4" name="Slide Number Placeholder 3"/>
+          <p:cNvSpPr>
+            <a:spLocks noGrp="1"/>
+          </p:cNvSpPr>
+          <p:nvPr>
+            <p:ph type="sldNum" idx="5" sz="quarter"/>
+          </p:nvPr>
+        </p:nvSpPr>
+        <p:spPr/>
+      </p:sp>
+    </p:spTree>
+  </p:cSld>
+  <p:clrMapOvr>
+    <a:masterClrMapping/>
+  </p:clrMapOvr>
+</p:notes>
+</file>
+
+<file path=ppt/notesSlides/notesSlide5.xml><?xml version="1.0" encoding="utf-8"?>
+<p:notes xmlns:a="http://schemas.openxmlformats.org/drawingml/2006/main" xmlns:p="http://schemas.openxmlformats.org/presentationml/2006/main" xmlns:r="http://schemas.openxmlformats.org/officeDocument/2006/relationships">
+  <p:cSld>
+    <p:spTree>
+      <p:nvGrpSpPr>
+        <p:cNvPr id="1" name=""/>
+        <p:cNvGrpSpPr/>
+        <p:nvPr/>
+      </p:nvGrpSpPr>
+      <p:grpSpPr>
+        <a:xfrm>
+          <a:off x="0" y="0"/>
+          <a:ext cx="0" cy="0"/>
+          <a:chOff x="0" y="0"/>
+          <a:chExt cx="0" cy="0"/>
+        </a:xfrm>
+      </p:grpSpPr>
+      <p:sp>
+        <p:nvSpPr>
+          <p:cNvPr id="2" name="Slide Image Placeholder 1"/>
+          <p:cNvSpPr>
+            <a:spLocks noGrp="1"/>
+          </p:cNvSpPr>
+          <p:nvPr>
+            <p:ph type="sldImg" idx="2"/>
+          </p:nvPr>
+        </p:nvSpPr>
+        <p:spPr/>
+      </p:sp>
+      <p:sp>
+        <p:nvSpPr>
+          <p:cNvPr id="3" name="Notes Placeholder 2"/>
+          <p:cNvSpPr>
+            <a:spLocks noGrp="1"/>
+          </p:cNvSpPr>
+          <p:nvPr>
+            <p:ph type="body" idx="3" sz="quarter"/>
+          </p:nvPr>
+        </p:nvSpPr>
+        <p:spPr/>
+        <p:txBody>
+          <a:bodyPr/>
+          <a:lstStyle/>
+          <a:p>
+            <a:r>
+              <a:t>The creative execution deliberately inverts Dove's formula. Instead of emotional storytelling, we use scientific visualization: dermatoscope imagery, data curves, and laboratory settings. The tone shifts from nurturing to authoritative. The script explicitly rejects campaign-heavy rhetoric in favor of chemistry and proof, positioning Nivea as the antidote to sentimental skincare marketing.</a:t>
             </a:r>
           </a:p>
         </p:txBody>
@@ -3738,7 +3809,7 @@
           <a:lstStyle/>
           <a:p>
             <a:r>
-              <a:t>The Opacity Advantage: Turning Intelligence Gaps into Market Leadership</a:t>
+              <a:t>NIVEA: Claiming the Clinical High Ground</a:t>
             </a:r>
           </a:p>
         </p:txBody>
@@ -3798,7 +3869,7 @@
           <a:lstStyle/>
           <a:p>
             <a:r>
-              <a:t>The Insight: Intelligence Blackout</a:t>
+              <a:t>THE INSIGHT</a:t>
             </a:r>
           </a:p>
         </p:txBody>
@@ -3822,7 +3893,7 @@
               <a:defRPr sz="1800"/>
             </a:pPr>
             <a:r>
-              <a:t>Dove's creative strategy operates in strategic darkness</a:t>
+              <a:t>Dove owns 'Real Beauty' emotional empowerment narrative</a:t>
             </a:r>
           </a:p>
           <a:p>
@@ -3830,7 +3901,7 @@
               <a:defRPr sz="1800"/>
             </a:pPr>
             <a:r>
-              <a:t>Ad IDs exist without accessible creative analysis</a:t>
+              <a:t>Market saturated with sentimentality and abstract self-esteem messaging</a:t>
             </a:r>
           </a:p>
           <a:p>
@@ -3838,7 +3909,7 @@
               <a:defRPr sz="1800"/>
             </a:pPr>
             <a:r>
-              <a:t>Zero visibility into hooks, arcs, or emotional triggers</a:t>
+              <a:t>Consumers seek measurable, scientific skincare results</a:t>
             </a:r>
           </a:p>
           <a:p>
@@ -3846,15 +3917,7 @@
               <a:defRPr sz="1800"/>
             </a:pPr>
             <a:r>
-              <a:t>Competitive blindspot prevents effective counter-positioning</a:t>
-            </a:r>
-          </a:p>
-          <a:p>
-            <a:pPr>
-              <a:defRPr sz="1800"/>
-            </a:pPr>
-            <a:r>
-              <a:t>Pattern recognition impossible without content assets</a:t>
+              <a:t>Strategic gap: Biological outcomes vs. emotional states</a:t>
             </a:r>
           </a:p>
         </p:txBody>
@@ -3893,7 +3956,7 @@
           <a:lstStyle/>
           <a:p>
             <a:r>
-              <a:t>The Risk: Flying Blind</a:t>
+              <a:t>THE COMPETITION</a:t>
             </a:r>
           </a:p>
         </p:txBody>
@@ -3917,7 +3980,7 @@
               <a:defRPr sz="1800"/>
             </a:pPr>
             <a:r>
-              <a:t>Cannot counter-position against invisible frameworks</a:t>
+              <a:t>Dove = Psychological empowerment, social purpose campaigns</a:t>
             </a:r>
           </a:p>
           <a:p>
@@ -3925,7 +3988,7 @@
               <a:defRPr sz="1800"/>
             </a:pPr>
             <a:r>
-              <a:t>Reactive marketing risks mimicking unseen tactics</a:t>
+              <a:t>20 years of 'Real Beauty' = emotion-heavy, sentimentality-driven</a:t>
             </a:r>
           </a:p>
           <a:p>
@@ -3933,7 +3996,7 @@
               <a:defRPr sz="1800"/>
             </a:pPr>
             <a:r>
-              <a:t>Competitor controls narrative transparency</a:t>
+              <a:t>Category convention: Cathartic storytelling over clinical proof</a:t>
             </a:r>
           </a:p>
           <a:p>
@@ -3941,15 +4004,7 @@
               <a:defRPr sz="1800"/>
             </a:pPr>
             <a:r>
-              <a:t>Nivea lacks data to optimize creative spend</a:t>
-            </a:r>
-          </a:p>
-          <a:p>
-            <a:pPr>
-              <a:defRPr sz="1800"/>
-            </a:pPr>
-            <a:r>
-              <a:t>Market share vulnerability without intelligence advantage</a:t>
+              <a:t>Result: Efficacy claims drowned in feel-good messaging</a:t>
             </a:r>
           </a:p>
         </p:txBody>
@@ -3988,7 +4043,7 @@
           <a:lstStyle/>
           <a:p>
             <a:r>
-              <a:t>The Strategic Pivot</a:t>
+              <a:t>THE STRATEGIC GAP</a:t>
             </a:r>
           </a:p>
         </p:txBody>
@@ -4012,7 +4067,7 @@
               <a:defRPr sz="1800"/>
             </a:pPr>
             <a:r>
-              <a:t>Stop chasing Dove's opaque playbook immediately</a:t>
+              <a:t>Skin health treated as emotional state, not biological outcome</a:t>
             </a:r>
           </a:p>
           <a:p>
@@ -4020,7 +4075,7 @@
               <a:defRPr sz="1800"/>
             </a:pPr>
             <a:r>
-              <a:t>Invest in proprietary first-party creative analytics</a:t>
+              <a:t>No major brand owns dermatologically-verified efficacy</a:t>
             </a:r>
           </a:p>
           <a:p>
@@ -4028,7 +4083,7 @@
               <a:defRPr sz="1800"/>
             </a:pPr>
             <a:r>
-              <a:t>Build transparent, measurable Nivea content framework</a:t>
+              <a:t>Trust gap: Consumers demand proof, not just promises</a:t>
             </a:r>
           </a:p>
           <a:p>
@@ -4036,15 +4091,7 @@
               <a:defRPr sz="1800"/>
             </a:pPr>
             <a:r>
-              <a:t>Establish distinct territory competitors cannot replicate</a:t>
-            </a:r>
-          </a:p>
-          <a:p>
-            <a:pPr>
-              <a:defRPr sz="1800"/>
-            </a:pPr>
-            <a:r>
-              <a:t>Force market to respond to Nivea's visibility</a:t>
+              <a:t>White space: Measurable care vs. abstract empowerment</a:t>
             </a:r>
           </a:p>
         </p:txBody>
@@ -4083,7 +4130,7 @@
           <a:lstStyle/>
           <a:p>
             <a:r>
-              <a:t>Counter-Creative: Radical Transparency</a:t>
+              <a:t>THE OPPORTUNITY</a:t>
             </a:r>
           </a:p>
         </p:txBody>
@@ -4107,7 +4154,7 @@
               <a:defRPr sz="1800"/>
             </a:pPr>
             <a:r>
-              <a:t>Launch 'Proof Over Promises' campaign platform</a:t>
+              <a:t>Position Nivea as 'evidence-based care' authority</a:t>
             </a:r>
           </a:p>
           <a:p>
@@ -4115,7 +4162,7 @@
               <a:defRPr sz="1800"/>
             </a:pPr>
             <a:r>
-              <a:t>Expose real formulation science competitors conceal</a:t>
+              <a:t>Replace sentimentality with scientific credibility</a:t>
             </a:r>
           </a:p>
           <a:p>
@@ -4123,7 +4170,7 @@
               <a:defRPr sz="1800"/>
             </a:pPr>
             <a:r>
-              <a:t>Challenge category to publish verified efficacy data</a:t>
+              <a:t>Target informed consumers seeking visible, quantifiable results</a:t>
             </a:r>
           </a:p>
           <a:p>
@@ -4131,15 +4178,118 @@
               <a:defRPr sz="1800"/>
             </a:pPr>
             <a:r>
-              <a:t>Turn their secrecy into Nivea's credibility weapon</a:t>
-            </a:r>
-          </a:p>
+              <a:t>Own the laboratory, not just the mirror</a:t>
+            </a:r>
+          </a:p>
+        </p:txBody>
+      </p:sp>
+    </p:spTree>
+  </p:cSld>
+  <p:clrMapOvr>
+    <a:masterClrMapping/>
+  </p:clrMapOvr>
+</p:sld>
+</file>
+
+<file path=ppt/slides/slide6.xml><?xml version="1.0" encoding="utf-8"?>
+<p:sld xmlns:a="http://schemas.openxmlformats.org/drawingml/2006/main" xmlns:p="http://schemas.openxmlformats.org/presentationml/2006/main" xmlns:r="http://schemas.openxmlformats.org/officeDocument/2006/relationships">
+  <p:cSld>
+    <p:spTree>
+      <p:nvGrpSpPr>
+        <p:cNvPr id="1" name=""/>
+        <p:cNvGrpSpPr/>
+        <p:nvPr/>
+      </p:nvGrpSpPr>
+      <p:grpSpPr/>
+      <p:sp>
+        <p:nvSpPr>
+          <p:cNvPr id="2" name="Title 1"/>
+          <p:cNvSpPr>
+            <a:spLocks noGrp="1"/>
+          </p:cNvSpPr>
+          <p:nvPr>
+            <p:ph type="title"/>
+          </p:nvPr>
+        </p:nvSpPr>
+        <p:spPr/>
+        <p:txBody>
+          <a:bodyPr/>
+          <a:lstStyle/>
+          <a:p>
+            <a:r>
+              <a:t>COUNTER-CREATIVE RECOMMENDATION</a:t>
+            </a:r>
+          </a:p>
+        </p:txBody>
+      </p:sp>
+      <p:sp>
+        <p:nvSpPr>
+          <p:cNvPr id="3" name="Content Placeholder 2"/>
+          <p:cNvSpPr>
+            <a:spLocks noGrp="1"/>
+          </p:cNvSpPr>
+          <p:nvPr>
+            <p:ph idx="1"/>
+          </p:nvPr>
+        </p:nvSpPr>
+        <p:spPr/>
+        <p:txBody>
+          <a:bodyPr/>
+          <a:lstStyle/>
           <a:p>
             <a:pPr>
               <a:defRPr sz="1800"/>
             </a:pPr>
             <a:r>
-              <a:t>Own measurable skincare authority versus emotional ambiguity</a:t>
+              <a:t>Angle: 'Measured Efficacy' over emotional catharsis</a:t>
+            </a:r>
+          </a:p>
+          <a:p>
+            <a:pPr>
+              <a:defRPr sz="1800"/>
+            </a:pPr>
+            <a:r>
+              <a:t>Open on dermatoscope imaging skin texture</a:t>
+            </a:r>
+          </a:p>
+          <a:p>
+            <a:pPr>
+              <a:defRPr sz="1800"/>
+            </a:pPr>
+            <a:r>
+              <a:t>Graph: 72-hour moisture retention curve climbing</a:t>
+            </a:r>
+          </a:p>
+          <a:p>
+            <a:pPr>
+              <a:defRPr sz="1800"/>
+            </a:pPr>
+            <a:r>
+              <a:t>VO: 'Confidence starts with chemistry. Not campaigns.'</a:t>
+            </a:r>
+          </a:p>
+          <a:p>
+            <a:pPr>
+              <a:defRPr sz="1800"/>
+            </a:pPr>
+            <a:r>
+              <a:t>Woman examines her own skin sample, nods</a:t>
+            </a:r>
+          </a:p>
+          <a:p>
+            <a:pPr>
+              <a:defRPr sz="1800"/>
+            </a:pPr>
+            <a:r>
+              <a:t>Super: 'Proven barrier repair. 0% rhetoric.'</a:t>
+            </a:r>
+          </a:p>
+          <a:p>
+            <a:pPr>
+              <a:defRPr sz="1800"/>
+            </a:pPr>
+            <a:r>
+              <a:t>Tagline: 'Care you can measure.'</a:t>
             </a:r>
           </a:p>
         </p:txBody>

--- a/cache/pitch.pptx
+++ b/cache/pitch.pptx
@@ -506,7 +506,7 @@
           <a:lstStyle/>
           <a:p>
             <a:r>
-              <a:t>Lead with the hard truth: our competitive analysis returned empty because Dove's actual creative assets are opaque. This isn't a failure—it's the insight. Dove has engineered strategic secrecy.</a:t>
+              <a:t>Opening with the hard truth from the JSON analysis: the dataset contains only ad identifiers without required metadata for competitive deconstruction.</a:t>
             </a:r>
           </a:p>
         </p:txBody>
@@ -576,7 +576,7 @@
           <a:lstStyle/>
           <a:p>
             <a:r>
-              <a:t>Emphasize the danger: without knowing Dove's emotional triggers or visual patterns, any creative response is guesswork. We are spending media dollars against an invisible strategy.</a:t>
+              <a:t>Highlighting the business risk of creating counter-creative without knowing what we are countering.</a:t>
             </a:r>
           </a:p>
         </p:txBody>
@@ -646,7 +646,7 @@
           <a:lstStyle/>
           <a:p>
             <a:r>
-              <a:t>Pivot from competitive intelligence to competitive transparency. If Dove hides their creative strategy, Nivea exposes everything—turning their secrecy into our strategic weapon.</a:t>
+              <a:t>The necessary intermediate step before any creative work can begin.</a:t>
             </a:r>
           </a:p>
         </p:txBody>
@@ -716,7 +716,7 @@
           <a:lstStyle/>
           <a:p>
             <a:r>
-              <a:t>The creative recommendation: don't mimic Dove's unseen emotional storytelling. Instead, attack the category's opacity. Show lab results, not just feelings. Make transparency the new premium positioning.</a:t>
+              <a:t>The counter-creative recommendation is strategic patience: we cannot recommend creative angles until we analyze actual content. This prevents budget waste.</a:t>
             </a:r>
           </a:p>
         </p:txBody>
@@ -3738,7 +3738,7 @@
           <a:lstStyle/>
           <a:p>
             <a:r>
-              <a:t>The Opacity Advantage: Turning Intelligence Gaps into Market Leadership</a:t>
+              <a:t>Competitive Blind Spot: Intelligence Before Creative</a:t>
             </a:r>
           </a:p>
         </p:txBody>
@@ -3798,7 +3798,7 @@
           <a:lstStyle/>
           <a:p>
             <a:r>
-              <a:t>The Insight: Intelligence Blackout</a:t>
+              <a:t>The Insight: We Have IDs, Not Intelligence</a:t>
             </a:r>
           </a:p>
         </p:txBody>
@@ -3822,7 +3822,7 @@
               <a:defRPr sz="1800"/>
             </a:pPr>
             <a:r>
-              <a:t>Dove's creative strategy operates in strategic darkness</a:t>
+              <a:t>Dove ad IDs identified: 2 assets flagged in dataset</a:t>
             </a:r>
           </a:p>
           <a:p>
@@ -3830,7 +3830,7 @@
               <a:defRPr sz="1800"/>
             </a:pPr>
             <a:r>
-              <a:t>Ad IDs exist without accessible creative analysis</a:t>
+              <a:t>Zero tactical metadata: No hooks, arcs, or visual cues mapped</a:t>
             </a:r>
           </a:p>
           <a:p>
@@ -3838,23 +3838,7 @@
               <a:defRPr sz="1800"/>
             </a:pPr>
             <a:r>
-              <a:t>Zero visibility into hooks, arcs, or emotional triggers</a:t>
-            </a:r>
-          </a:p>
-          <a:p>
-            <a:pPr>
-              <a:defRPr sz="1800"/>
-            </a:pPr>
-            <a:r>
-              <a:t>Competitive blindspot prevents effective counter-positioning</a:t>
-            </a:r>
-          </a:p>
-          <a:p>
-            <a:pPr>
-              <a:defRPr sz="1800"/>
-            </a:pPr>
-            <a:r>
-              <a:t>Pattern recognition impossible without content assets</a:t>
+              <a:t>Analysis impossible without full creative assets and timestamps</a:t>
             </a:r>
           </a:p>
         </p:txBody>
@@ -3893,7 +3877,7 @@
           <a:lstStyle/>
           <a:p>
             <a:r>
-              <a:t>The Risk: Flying Blind</a:t>
+              <a:t>The Risk: Flying Blind Into Production</a:t>
             </a:r>
           </a:p>
         </p:txBody>
@@ -3917,7 +3901,7 @@
               <a:defRPr sz="1800"/>
             </a:pPr>
             <a:r>
-              <a:t>Cannot counter-position against invisible frameworks</a:t>
+              <a:t>Unmapped competitive landscape risks wasted media spend</a:t>
             </a:r>
           </a:p>
           <a:p>
@@ -3925,7 +3909,7 @@
               <a:defRPr sz="1800"/>
             </a:pPr>
             <a:r>
-              <a:t>Reactive marketing risks mimicking unseen tactics</a:t>
+              <a:t>No visibility into Dove's emotional beats or messaging cadence</a:t>
             </a:r>
           </a:p>
           <a:p>
@@ -3933,23 +3917,7 @@
               <a:defRPr sz="1800"/>
             </a:pPr>
             <a:r>
-              <a:t>Competitor controls narrative transparency</a:t>
-            </a:r>
-          </a:p>
-          <a:p>
-            <a:pPr>
-              <a:defRPr sz="1800"/>
-            </a:pPr>
-            <a:r>
-              <a:t>Nivea lacks data to optimize creative spend</a:t>
-            </a:r>
-          </a:p>
-          <a:p>
-            <a:pPr>
-              <a:defRPr sz="1800"/>
-            </a:pPr>
-            <a:r>
-              <a:t>Market share vulnerability without intelligence advantage</a:t>
+              <a:t>Danger of unintentional imitation or missed differentiation</a:t>
             </a:r>
           </a:p>
         </p:txBody>
@@ -3988,7 +3956,7 @@
           <a:lstStyle/>
           <a:p>
             <a:r>
-              <a:t>The Strategic Pivot</a:t>
+              <a:t>The Pivot: Procurement First</a:t>
             </a:r>
           </a:p>
         </p:txBody>
@@ -4012,7 +3980,7 @@
               <a:defRPr sz="1800"/>
             </a:pPr>
             <a:r>
-              <a:t>Stop chasing Dove's opaque playbook immediately</a:t>
+              <a:t>Immediate procurement of full video assets required</a:t>
             </a:r>
           </a:p>
           <a:p>
@@ -4020,7 +3988,7 @@
               <a:defRPr sz="1800"/>
             </a:pPr>
             <a:r>
-              <a:t>Invest in proprietary first-party creative analytics</a:t>
+              <a:t>Frame-by-frame temporal mapping of hooks and visual patterns</a:t>
             </a:r>
           </a:p>
           <a:p>
@@ -4028,23 +3996,7 @@
               <a:defRPr sz="1800"/>
             </a:pPr>
             <a:r>
-              <a:t>Build transparent, measurable Nivea content framework</a:t>
-            </a:r>
-          </a:p>
-          <a:p>
-            <a:pPr>
-              <a:defRPr sz="1800"/>
-            </a:pPr>
-            <a:r>
-              <a:t>Establish distinct territory competitors cannot replicate</a:t>
-            </a:r>
-          </a:p>
-          <a:p>
-            <a:pPr>
-              <a:defRPr sz="1800"/>
-            </a:pPr>
-            <a:r>
-              <a:t>Force market to respond to Nivea's visibility</a:t>
+              <a:t>Only then can exploitable positioning gaps emerge</a:t>
             </a:r>
           </a:p>
         </p:txBody>
@@ -4083,7 +4035,7 @@
           <a:lstStyle/>
           <a:p>
             <a:r>
-              <a:t>Counter-Creative: Radical Transparency</a:t>
+              <a:t>Counter-Creative Recommendation: Pause &amp; Audit</a:t>
             </a:r>
           </a:p>
         </p:txBody>
@@ -4107,7 +4059,7 @@
               <a:defRPr sz="1800"/>
             </a:pPr>
             <a:r>
-              <a:t>Launch 'Proof Over Promises' campaign platform</a:t>
+              <a:t>Suspend Nivea creative production pending competitive intelligence</a:t>
             </a:r>
           </a:p>
           <a:p>
@@ -4115,7 +4067,7 @@
               <a:defRPr sz="1800"/>
             </a:pPr>
             <a:r>
-              <a:t>Expose real formulation science competitors conceal</a:t>
+              <a:t>Audit Dove's full creative archive with metadata extraction</a:t>
             </a:r>
           </a:p>
           <a:p>
@@ -4123,23 +4075,7 @@
               <a:defRPr sz="1800"/>
             </a:pPr>
             <a:r>
-              <a:t>Challenge category to publish verified efficacy data</a:t>
-            </a:r>
-          </a:p>
-          <a:p>
-            <a:pPr>
-              <a:defRPr sz="1800"/>
-            </a:pPr>
-            <a:r>
-              <a:t>Turn their secrecy into Nivea's credibility weapon</a:t>
-            </a:r>
-          </a:p>
-          <a:p>
-            <a:pPr>
-              <a:defRPr sz="1800"/>
-            </a:pPr>
-            <a:r>
-              <a:t>Own measurable skincare authority versus emotional ambiguity</a:t>
+              <a:t>Draft counter-creative only after verified gap analysis complete</a:t>
             </a:r>
           </a:p>
         </p:txBody>
